--- a/同來讚美.pptx
+++ b/同來讚美.pptx
@@ -5,10 +5,11 @@
     <p:sldMasterId id="2147483660" r:id="rId1"/>
   </p:sldMasterIdLst>
   <p:sldIdLst>
-    <p:sldId id="256" r:id="rId2"/>
-    <p:sldId id="257" r:id="rId3"/>
-    <p:sldId id="259" r:id="rId4"/>
-    <p:sldId id="258" r:id="rId5"/>
+    <p:sldId id="613" r:id="rId2"/>
+    <p:sldId id="615" r:id="rId3"/>
+    <p:sldId id="616" r:id="rId4"/>
+    <p:sldId id="617" r:id="rId5"/>
+    <p:sldId id="618" r:id="rId6"/>
   </p:sldIdLst>
   <p:sldSz cx="9144000" cy="5143500" type="screen16x9"/>
   <p:notesSz cx="6858000" cy="9144000"/>
@@ -107,6 +108,22 @@
       </a:defRPr>
     </a:lvl9pPr>
   </p:defaultTextStyle>
+  <p:extLst>
+    <p:ext uri="{EFAFB233-063F-42B5-8137-9DF3F51BA10A}">
+      <p15:sldGuideLst xmlns:p15="http://schemas.microsoft.com/office/powerpoint/2012/main">
+        <p15:guide id="1" orient="horz" pos="1620">
+          <p15:clr>
+            <a:srgbClr val="A4A3A4"/>
+          </p15:clr>
+        </p15:guide>
+        <p15:guide id="2" pos="2880">
+          <p15:clr>
+            <a:srgbClr val="A4A3A4"/>
+          </p15:clr>
+        </p15:guide>
+      </p15:sldGuideLst>
+    </p:ext>
+  </p:extLst>
 </p:presentation>
 </file>
 
@@ -148,10 +165,9 @@
           <a:lstStyle/>
           <a:p>
             <a:r>
-              <a:rPr lang="zh-TW" altLang="en-US" smtClean="0"/>
+              <a:rPr lang="zh-TW" altLang="en-US"/>
               <a:t>按一下以編輯母片標題樣式</a:t>
             </a:r>
-            <a:endParaRPr lang="zh-TW" altLang="en-US"/>
           </a:p>
         </p:txBody>
       </p:sp>
@@ -267,10 +283,9 @@
           </a:lstStyle>
           <a:p>
             <a:r>
-              <a:rPr lang="zh-TW" altLang="en-US" smtClean="0"/>
+              <a:rPr lang="zh-TW" altLang="en-US"/>
               <a:t>按一下以編輯母片副標題樣式</a:t>
             </a:r>
-            <a:endParaRPr lang="zh-TW" altLang="en-US"/>
           </a:p>
         </p:txBody>
       </p:sp>
@@ -292,7 +307,7 @@
             <a:fld id="{F449C270-FC28-4AC5-8AFF-223843BA4068}" type="datetimeFigureOut">
               <a:rPr lang="zh-TW" altLang="en-US" smtClean="0"/>
               <a:pPr/>
-              <a:t>2019/9/7</a:t>
+              <a:t>2024/6/15</a:t>
             </a:fld>
             <a:endParaRPr lang="zh-TW" altLang="en-US"/>
           </a:p>
@@ -382,10 +397,9 @@
           <a:lstStyle/>
           <a:p>
             <a:r>
-              <a:rPr lang="zh-TW" altLang="en-US" smtClean="0"/>
+              <a:rPr lang="zh-TW" altLang="en-US"/>
               <a:t>按一下以編輯母片標題樣式</a:t>
             </a:r>
-            <a:endParaRPr lang="zh-TW" altLang="en-US"/>
           </a:p>
         </p:txBody>
       </p:sp>
@@ -406,38 +420,37 @@
           <a:p>
             <a:pPr lvl="0"/>
             <a:r>
-              <a:rPr lang="zh-TW" altLang="en-US" smtClean="0"/>
+              <a:rPr lang="zh-TW" altLang="en-US"/>
               <a:t>按一下以編輯母片文字樣式</a:t>
             </a:r>
           </a:p>
           <a:p>
             <a:pPr lvl="1"/>
             <a:r>
-              <a:rPr lang="zh-TW" altLang="en-US" smtClean="0"/>
+              <a:rPr lang="zh-TW" altLang="en-US"/>
               <a:t>第二層</a:t>
             </a:r>
           </a:p>
           <a:p>
             <a:pPr lvl="2"/>
             <a:r>
-              <a:rPr lang="zh-TW" altLang="en-US" smtClean="0"/>
+              <a:rPr lang="zh-TW" altLang="en-US"/>
               <a:t>第三層</a:t>
             </a:r>
           </a:p>
           <a:p>
             <a:pPr lvl="3"/>
             <a:r>
-              <a:rPr lang="zh-TW" altLang="en-US" smtClean="0"/>
+              <a:rPr lang="zh-TW" altLang="en-US"/>
               <a:t>第四層</a:t>
             </a:r>
           </a:p>
           <a:p>
             <a:pPr lvl="4"/>
             <a:r>
-              <a:rPr lang="zh-TW" altLang="en-US" smtClean="0"/>
+              <a:rPr lang="zh-TW" altLang="en-US"/>
               <a:t>第五層</a:t>
             </a:r>
-            <a:endParaRPr lang="zh-TW" altLang="en-US"/>
           </a:p>
         </p:txBody>
       </p:sp>
@@ -459,7 +472,7 @@
             <a:fld id="{F449C270-FC28-4AC5-8AFF-223843BA4068}" type="datetimeFigureOut">
               <a:rPr lang="zh-TW" altLang="en-US" smtClean="0"/>
               <a:pPr/>
-              <a:t>2019/9/7</a:t>
+              <a:t>2024/6/15</a:t>
             </a:fld>
             <a:endParaRPr lang="zh-TW" altLang="en-US"/>
           </a:p>
@@ -554,10 +567,9 @@
           <a:lstStyle/>
           <a:p>
             <a:r>
-              <a:rPr lang="zh-TW" altLang="en-US" smtClean="0"/>
+              <a:rPr lang="zh-TW" altLang="en-US"/>
               <a:t>按一下以編輯母片標題樣式</a:t>
             </a:r>
-            <a:endParaRPr lang="zh-TW" altLang="en-US"/>
           </a:p>
         </p:txBody>
       </p:sp>
@@ -583,38 +595,37 @@
           <a:p>
             <a:pPr lvl="0"/>
             <a:r>
-              <a:rPr lang="zh-TW" altLang="en-US" smtClean="0"/>
+              <a:rPr lang="zh-TW" altLang="en-US"/>
               <a:t>按一下以編輯母片文字樣式</a:t>
             </a:r>
           </a:p>
           <a:p>
             <a:pPr lvl="1"/>
             <a:r>
-              <a:rPr lang="zh-TW" altLang="en-US" smtClean="0"/>
+              <a:rPr lang="zh-TW" altLang="en-US"/>
               <a:t>第二層</a:t>
             </a:r>
           </a:p>
           <a:p>
             <a:pPr lvl="2"/>
             <a:r>
-              <a:rPr lang="zh-TW" altLang="en-US" smtClean="0"/>
+              <a:rPr lang="zh-TW" altLang="en-US"/>
               <a:t>第三層</a:t>
             </a:r>
           </a:p>
           <a:p>
             <a:pPr lvl="3"/>
             <a:r>
-              <a:rPr lang="zh-TW" altLang="en-US" smtClean="0"/>
+              <a:rPr lang="zh-TW" altLang="en-US"/>
               <a:t>第四層</a:t>
             </a:r>
           </a:p>
           <a:p>
             <a:pPr lvl="4"/>
             <a:r>
-              <a:rPr lang="zh-TW" altLang="en-US" smtClean="0"/>
+              <a:rPr lang="zh-TW" altLang="en-US"/>
               <a:t>第五層</a:t>
             </a:r>
-            <a:endParaRPr lang="zh-TW" altLang="en-US"/>
           </a:p>
         </p:txBody>
       </p:sp>
@@ -636,7 +647,7 @@
             <a:fld id="{F449C270-FC28-4AC5-8AFF-223843BA4068}" type="datetimeFigureOut">
               <a:rPr lang="zh-TW" altLang="en-US" smtClean="0"/>
               <a:pPr/>
-              <a:t>2019/9/7</a:t>
+              <a:t>2024/6/15</a:t>
             </a:fld>
             <a:endParaRPr lang="zh-TW" altLang="en-US"/>
           </a:p>
@@ -726,10 +737,9 @@
           <a:lstStyle/>
           <a:p>
             <a:r>
-              <a:rPr lang="zh-TW" altLang="en-US" smtClean="0"/>
+              <a:rPr lang="zh-TW" altLang="en-US"/>
               <a:t>按一下以編輯母片標題樣式</a:t>
             </a:r>
-            <a:endParaRPr lang="zh-TW" altLang="en-US"/>
           </a:p>
         </p:txBody>
       </p:sp>
@@ -750,38 +760,37 @@
           <a:p>
             <a:pPr lvl="0"/>
             <a:r>
-              <a:rPr lang="zh-TW" altLang="en-US" smtClean="0"/>
+              <a:rPr lang="zh-TW" altLang="en-US"/>
               <a:t>按一下以編輯母片文字樣式</a:t>
             </a:r>
           </a:p>
           <a:p>
             <a:pPr lvl="1"/>
             <a:r>
-              <a:rPr lang="zh-TW" altLang="en-US" smtClean="0"/>
+              <a:rPr lang="zh-TW" altLang="en-US"/>
               <a:t>第二層</a:t>
             </a:r>
           </a:p>
           <a:p>
             <a:pPr lvl="2"/>
             <a:r>
-              <a:rPr lang="zh-TW" altLang="en-US" smtClean="0"/>
+              <a:rPr lang="zh-TW" altLang="en-US"/>
               <a:t>第三層</a:t>
             </a:r>
           </a:p>
           <a:p>
             <a:pPr lvl="3"/>
             <a:r>
-              <a:rPr lang="zh-TW" altLang="en-US" smtClean="0"/>
+              <a:rPr lang="zh-TW" altLang="en-US"/>
               <a:t>第四層</a:t>
             </a:r>
           </a:p>
           <a:p>
             <a:pPr lvl="4"/>
             <a:r>
-              <a:rPr lang="zh-TW" altLang="en-US" smtClean="0"/>
+              <a:rPr lang="zh-TW" altLang="en-US"/>
               <a:t>第五層</a:t>
             </a:r>
-            <a:endParaRPr lang="zh-TW" altLang="en-US"/>
           </a:p>
         </p:txBody>
       </p:sp>
@@ -803,7 +812,7 @@
             <a:fld id="{F449C270-FC28-4AC5-8AFF-223843BA4068}" type="datetimeFigureOut">
               <a:rPr lang="zh-TW" altLang="en-US" smtClean="0"/>
               <a:pPr/>
-              <a:t>2019/9/7</a:t>
+              <a:t>2024/6/15</a:t>
             </a:fld>
             <a:endParaRPr lang="zh-TW" altLang="en-US"/>
           </a:p>
@@ -902,10 +911,9 @@
           </a:lstStyle>
           <a:p>
             <a:r>
-              <a:rPr lang="zh-TW" altLang="en-US" smtClean="0"/>
+              <a:rPr lang="zh-TW" altLang="en-US"/>
               <a:t>按一下以編輯母片標題樣式</a:t>
             </a:r>
-            <a:endParaRPr lang="zh-TW" altLang="en-US"/>
           </a:p>
         </p:txBody>
       </p:sp>
@@ -1022,7 +1030,7 @@
           <a:p>
             <a:pPr lvl="0"/>
             <a:r>
-              <a:rPr lang="zh-TW" altLang="en-US" smtClean="0"/>
+              <a:rPr lang="zh-TW" altLang="en-US"/>
               <a:t>按一下以編輯母片文字樣式</a:t>
             </a:r>
           </a:p>
@@ -1046,7 +1054,7 @@
             <a:fld id="{F449C270-FC28-4AC5-8AFF-223843BA4068}" type="datetimeFigureOut">
               <a:rPr lang="zh-TW" altLang="en-US" smtClean="0"/>
               <a:pPr/>
-              <a:t>2019/9/7</a:t>
+              <a:t>2024/6/15</a:t>
             </a:fld>
             <a:endParaRPr lang="zh-TW" altLang="en-US"/>
           </a:p>
@@ -1136,10 +1144,9 @@
           <a:lstStyle/>
           <a:p>
             <a:r>
-              <a:rPr lang="zh-TW" altLang="en-US" smtClean="0"/>
+              <a:rPr lang="zh-TW" altLang="en-US"/>
               <a:t>按一下以編輯母片標題樣式</a:t>
             </a:r>
-            <a:endParaRPr lang="zh-TW" altLang="en-US"/>
           </a:p>
         </p:txBody>
       </p:sp>
@@ -1193,38 +1200,37 @@
           <a:p>
             <a:pPr lvl="0"/>
             <a:r>
-              <a:rPr lang="zh-TW" altLang="en-US" smtClean="0"/>
+              <a:rPr lang="zh-TW" altLang="en-US"/>
               <a:t>按一下以編輯母片文字樣式</a:t>
             </a:r>
           </a:p>
           <a:p>
             <a:pPr lvl="1"/>
             <a:r>
-              <a:rPr lang="zh-TW" altLang="en-US" smtClean="0"/>
+              <a:rPr lang="zh-TW" altLang="en-US"/>
               <a:t>第二層</a:t>
             </a:r>
           </a:p>
           <a:p>
             <a:pPr lvl="2"/>
             <a:r>
-              <a:rPr lang="zh-TW" altLang="en-US" smtClean="0"/>
+              <a:rPr lang="zh-TW" altLang="en-US"/>
               <a:t>第三層</a:t>
             </a:r>
           </a:p>
           <a:p>
             <a:pPr lvl="3"/>
             <a:r>
-              <a:rPr lang="zh-TW" altLang="en-US" smtClean="0"/>
+              <a:rPr lang="zh-TW" altLang="en-US"/>
               <a:t>第四層</a:t>
             </a:r>
           </a:p>
           <a:p>
             <a:pPr lvl="4"/>
             <a:r>
-              <a:rPr lang="zh-TW" altLang="en-US" smtClean="0"/>
+              <a:rPr lang="zh-TW" altLang="en-US"/>
               <a:t>第五層</a:t>
             </a:r>
-            <a:endParaRPr lang="zh-TW" altLang="en-US"/>
           </a:p>
         </p:txBody>
       </p:sp>
@@ -1278,38 +1284,37 @@
           <a:p>
             <a:pPr lvl="0"/>
             <a:r>
-              <a:rPr lang="zh-TW" altLang="en-US" smtClean="0"/>
+              <a:rPr lang="zh-TW" altLang="en-US"/>
               <a:t>按一下以編輯母片文字樣式</a:t>
             </a:r>
           </a:p>
           <a:p>
             <a:pPr lvl="1"/>
             <a:r>
-              <a:rPr lang="zh-TW" altLang="en-US" smtClean="0"/>
+              <a:rPr lang="zh-TW" altLang="en-US"/>
               <a:t>第二層</a:t>
             </a:r>
           </a:p>
           <a:p>
             <a:pPr lvl="2"/>
             <a:r>
-              <a:rPr lang="zh-TW" altLang="en-US" smtClean="0"/>
+              <a:rPr lang="zh-TW" altLang="en-US"/>
               <a:t>第三層</a:t>
             </a:r>
           </a:p>
           <a:p>
             <a:pPr lvl="3"/>
             <a:r>
-              <a:rPr lang="zh-TW" altLang="en-US" smtClean="0"/>
+              <a:rPr lang="zh-TW" altLang="en-US"/>
               <a:t>第四層</a:t>
             </a:r>
           </a:p>
           <a:p>
             <a:pPr lvl="4"/>
             <a:r>
-              <a:rPr lang="zh-TW" altLang="en-US" smtClean="0"/>
+              <a:rPr lang="zh-TW" altLang="en-US"/>
               <a:t>第五層</a:t>
             </a:r>
-            <a:endParaRPr lang="zh-TW" altLang="en-US"/>
           </a:p>
         </p:txBody>
       </p:sp>
@@ -1331,7 +1336,7 @@
             <a:fld id="{F449C270-FC28-4AC5-8AFF-223843BA4068}" type="datetimeFigureOut">
               <a:rPr lang="zh-TW" altLang="en-US" smtClean="0"/>
               <a:pPr/>
-              <a:t>2019/9/7</a:t>
+              <a:t>2024/6/15</a:t>
             </a:fld>
             <a:endParaRPr lang="zh-TW" altLang="en-US"/>
           </a:p>
@@ -1425,10 +1430,9 @@
           </a:lstStyle>
           <a:p>
             <a:r>
-              <a:rPr lang="zh-TW" altLang="en-US" smtClean="0"/>
+              <a:rPr lang="zh-TW" altLang="en-US"/>
               <a:t>按一下以編輯母片標題樣式</a:t>
             </a:r>
-            <a:endParaRPr lang="zh-TW" altLang="en-US"/>
           </a:p>
         </p:txBody>
       </p:sp>
@@ -1491,7 +1495,7 @@
           <a:p>
             <a:pPr lvl="0"/>
             <a:r>
-              <a:rPr lang="zh-TW" altLang="en-US" smtClean="0"/>
+              <a:rPr lang="zh-TW" altLang="en-US"/>
               <a:t>按一下以編輯母片文字樣式</a:t>
             </a:r>
           </a:p>
@@ -1547,38 +1551,37 @@
           <a:p>
             <a:pPr lvl="0"/>
             <a:r>
-              <a:rPr lang="zh-TW" altLang="en-US" smtClean="0"/>
+              <a:rPr lang="zh-TW" altLang="en-US"/>
               <a:t>按一下以編輯母片文字樣式</a:t>
             </a:r>
           </a:p>
           <a:p>
             <a:pPr lvl="1"/>
             <a:r>
-              <a:rPr lang="zh-TW" altLang="en-US" smtClean="0"/>
+              <a:rPr lang="zh-TW" altLang="en-US"/>
               <a:t>第二層</a:t>
             </a:r>
           </a:p>
           <a:p>
             <a:pPr lvl="2"/>
             <a:r>
-              <a:rPr lang="zh-TW" altLang="en-US" smtClean="0"/>
+              <a:rPr lang="zh-TW" altLang="en-US"/>
               <a:t>第三層</a:t>
             </a:r>
           </a:p>
           <a:p>
             <a:pPr lvl="3"/>
             <a:r>
-              <a:rPr lang="zh-TW" altLang="en-US" smtClean="0"/>
+              <a:rPr lang="zh-TW" altLang="en-US"/>
               <a:t>第四層</a:t>
             </a:r>
           </a:p>
           <a:p>
             <a:pPr lvl="4"/>
             <a:r>
-              <a:rPr lang="zh-TW" altLang="en-US" smtClean="0"/>
+              <a:rPr lang="zh-TW" altLang="en-US"/>
               <a:t>第五層</a:t>
             </a:r>
-            <a:endParaRPr lang="zh-TW" altLang="en-US"/>
           </a:p>
         </p:txBody>
       </p:sp>
@@ -1641,7 +1644,7 @@
           <a:p>
             <a:pPr lvl="0"/>
             <a:r>
-              <a:rPr lang="zh-TW" altLang="en-US" smtClean="0"/>
+              <a:rPr lang="zh-TW" altLang="en-US"/>
               <a:t>按一下以編輯母片文字樣式</a:t>
             </a:r>
           </a:p>
@@ -1697,38 +1700,37 @@
           <a:p>
             <a:pPr lvl="0"/>
             <a:r>
-              <a:rPr lang="zh-TW" altLang="en-US" smtClean="0"/>
+              <a:rPr lang="zh-TW" altLang="en-US"/>
               <a:t>按一下以編輯母片文字樣式</a:t>
             </a:r>
           </a:p>
           <a:p>
             <a:pPr lvl="1"/>
             <a:r>
-              <a:rPr lang="zh-TW" altLang="en-US" smtClean="0"/>
+              <a:rPr lang="zh-TW" altLang="en-US"/>
               <a:t>第二層</a:t>
             </a:r>
           </a:p>
           <a:p>
             <a:pPr lvl="2"/>
             <a:r>
-              <a:rPr lang="zh-TW" altLang="en-US" smtClean="0"/>
+              <a:rPr lang="zh-TW" altLang="en-US"/>
               <a:t>第三層</a:t>
             </a:r>
           </a:p>
           <a:p>
             <a:pPr lvl="3"/>
             <a:r>
-              <a:rPr lang="zh-TW" altLang="en-US" smtClean="0"/>
+              <a:rPr lang="zh-TW" altLang="en-US"/>
               <a:t>第四層</a:t>
             </a:r>
           </a:p>
           <a:p>
             <a:pPr lvl="4"/>
             <a:r>
-              <a:rPr lang="zh-TW" altLang="en-US" smtClean="0"/>
+              <a:rPr lang="zh-TW" altLang="en-US"/>
               <a:t>第五層</a:t>
             </a:r>
-            <a:endParaRPr lang="zh-TW" altLang="en-US"/>
           </a:p>
         </p:txBody>
       </p:sp>
@@ -1750,7 +1752,7 @@
             <a:fld id="{F449C270-FC28-4AC5-8AFF-223843BA4068}" type="datetimeFigureOut">
               <a:rPr lang="zh-TW" altLang="en-US" smtClean="0"/>
               <a:pPr/>
-              <a:t>2019/9/7</a:t>
+              <a:t>2024/6/15</a:t>
             </a:fld>
             <a:endParaRPr lang="zh-TW" altLang="en-US"/>
           </a:p>
@@ -1840,10 +1842,9 @@
           <a:lstStyle/>
           <a:p>
             <a:r>
-              <a:rPr lang="zh-TW" altLang="en-US" smtClean="0"/>
+              <a:rPr lang="zh-TW" altLang="en-US"/>
               <a:t>按一下以編輯母片標題樣式</a:t>
             </a:r>
-            <a:endParaRPr lang="zh-TW" altLang="en-US"/>
           </a:p>
         </p:txBody>
       </p:sp>
@@ -1865,7 +1866,7 @@
             <a:fld id="{F449C270-FC28-4AC5-8AFF-223843BA4068}" type="datetimeFigureOut">
               <a:rPr lang="zh-TW" altLang="en-US" smtClean="0"/>
               <a:pPr/>
-              <a:t>2019/9/7</a:t>
+              <a:t>2024/6/15</a:t>
             </a:fld>
             <a:endParaRPr lang="zh-TW" altLang="en-US"/>
           </a:p>
@@ -1957,7 +1958,7 @@
             <a:fld id="{F449C270-FC28-4AC5-8AFF-223843BA4068}" type="datetimeFigureOut">
               <a:rPr lang="zh-TW" altLang="en-US" smtClean="0"/>
               <a:pPr/>
-              <a:t>2019/9/7</a:t>
+              <a:t>2024/6/15</a:t>
             </a:fld>
             <a:endParaRPr lang="zh-TW" altLang="en-US"/>
           </a:p>
@@ -2056,10 +2057,9 @@
           </a:lstStyle>
           <a:p>
             <a:r>
-              <a:rPr lang="zh-TW" altLang="en-US" smtClean="0"/>
+              <a:rPr lang="zh-TW" altLang="en-US"/>
               <a:t>按一下以編輯母片標題樣式</a:t>
             </a:r>
-            <a:endParaRPr lang="zh-TW" altLang="en-US"/>
           </a:p>
         </p:txBody>
       </p:sp>
@@ -2113,38 +2113,37 @@
           <a:p>
             <a:pPr lvl="0"/>
             <a:r>
-              <a:rPr lang="zh-TW" altLang="en-US" smtClean="0"/>
+              <a:rPr lang="zh-TW" altLang="en-US"/>
               <a:t>按一下以編輯母片文字樣式</a:t>
             </a:r>
           </a:p>
           <a:p>
             <a:pPr lvl="1"/>
             <a:r>
-              <a:rPr lang="zh-TW" altLang="en-US" smtClean="0"/>
+              <a:rPr lang="zh-TW" altLang="en-US"/>
               <a:t>第二層</a:t>
             </a:r>
           </a:p>
           <a:p>
             <a:pPr lvl="2"/>
             <a:r>
-              <a:rPr lang="zh-TW" altLang="en-US" smtClean="0"/>
+              <a:rPr lang="zh-TW" altLang="en-US"/>
               <a:t>第三層</a:t>
             </a:r>
           </a:p>
           <a:p>
             <a:pPr lvl="3"/>
             <a:r>
-              <a:rPr lang="zh-TW" altLang="en-US" smtClean="0"/>
+              <a:rPr lang="zh-TW" altLang="en-US"/>
               <a:t>第四層</a:t>
             </a:r>
           </a:p>
           <a:p>
             <a:pPr lvl="4"/>
             <a:r>
-              <a:rPr lang="zh-TW" altLang="en-US" smtClean="0"/>
+              <a:rPr lang="zh-TW" altLang="en-US"/>
               <a:t>第五層</a:t>
             </a:r>
-            <a:endParaRPr lang="zh-TW" altLang="en-US"/>
           </a:p>
         </p:txBody>
       </p:sp>
@@ -2207,7 +2206,7 @@
           <a:p>
             <a:pPr lvl="0"/>
             <a:r>
-              <a:rPr lang="zh-TW" altLang="en-US" smtClean="0"/>
+              <a:rPr lang="zh-TW" altLang="en-US"/>
               <a:t>按一下以編輯母片文字樣式</a:t>
             </a:r>
           </a:p>
@@ -2231,7 +2230,7 @@
             <a:fld id="{F449C270-FC28-4AC5-8AFF-223843BA4068}" type="datetimeFigureOut">
               <a:rPr lang="zh-TW" altLang="en-US" smtClean="0"/>
               <a:pPr/>
-              <a:t>2019/9/7</a:t>
+              <a:t>2024/6/15</a:t>
             </a:fld>
             <a:endParaRPr lang="zh-TW" altLang="en-US"/>
           </a:p>
@@ -2330,10 +2329,9 @@
           </a:lstStyle>
           <a:p>
             <a:r>
-              <a:rPr lang="zh-TW" altLang="en-US" smtClean="0"/>
+              <a:rPr lang="zh-TW" altLang="en-US"/>
               <a:t>按一下以編輯母片標題樣式</a:t>
             </a:r>
-            <a:endParaRPr lang="zh-TW" altLang="en-US"/>
           </a:p>
         </p:txBody>
       </p:sp>
@@ -2395,10 +2393,9 @@
           </a:lstStyle>
           <a:p>
             <a:r>
-              <a:rPr lang="zh-TW" altLang="en-US" smtClean="0"/>
+              <a:rPr lang="zh-TW" altLang="en-US"/>
               <a:t>按一下圖示以新增圖片</a:t>
             </a:r>
-            <a:endParaRPr lang="zh-TW" altLang="en-US"/>
           </a:p>
         </p:txBody>
       </p:sp>
@@ -2461,7 +2458,7 @@
           <a:p>
             <a:pPr lvl="0"/>
             <a:r>
-              <a:rPr lang="zh-TW" altLang="en-US" smtClean="0"/>
+              <a:rPr lang="zh-TW" altLang="en-US"/>
               <a:t>按一下以編輯母片文字樣式</a:t>
             </a:r>
           </a:p>
@@ -2485,7 +2482,7 @@
             <a:fld id="{F449C270-FC28-4AC5-8AFF-223843BA4068}" type="datetimeFigureOut">
               <a:rPr lang="zh-TW" altLang="en-US" smtClean="0"/>
               <a:pPr/>
-              <a:t>2019/9/7</a:t>
+              <a:t>2024/6/15</a:t>
             </a:fld>
             <a:endParaRPr lang="zh-TW" altLang="en-US"/>
           </a:p>
@@ -2595,10 +2592,9 @@
           <a:lstStyle/>
           <a:p>
             <a:r>
-              <a:rPr lang="zh-TW" altLang="en-US" smtClean="0"/>
+              <a:rPr lang="zh-TW" altLang="en-US"/>
               <a:t>按一下以編輯母片標題樣式</a:t>
             </a:r>
-            <a:endParaRPr lang="zh-TW" altLang="en-US"/>
           </a:p>
         </p:txBody>
       </p:sp>
@@ -2629,38 +2625,37 @@
           <a:p>
             <a:pPr lvl="0"/>
             <a:r>
-              <a:rPr lang="zh-TW" altLang="en-US" smtClean="0"/>
+              <a:rPr lang="zh-TW" altLang="en-US"/>
               <a:t>按一下以編輯母片文字樣式</a:t>
             </a:r>
           </a:p>
           <a:p>
             <a:pPr lvl="1"/>
             <a:r>
-              <a:rPr lang="zh-TW" altLang="en-US" smtClean="0"/>
+              <a:rPr lang="zh-TW" altLang="en-US"/>
               <a:t>第二層</a:t>
             </a:r>
           </a:p>
           <a:p>
             <a:pPr lvl="2"/>
             <a:r>
-              <a:rPr lang="zh-TW" altLang="en-US" smtClean="0"/>
+              <a:rPr lang="zh-TW" altLang="en-US"/>
               <a:t>第三層</a:t>
             </a:r>
           </a:p>
           <a:p>
             <a:pPr lvl="3"/>
             <a:r>
-              <a:rPr lang="zh-TW" altLang="en-US" smtClean="0"/>
+              <a:rPr lang="zh-TW" altLang="en-US"/>
               <a:t>第四層</a:t>
             </a:r>
           </a:p>
           <a:p>
             <a:pPr lvl="4"/>
             <a:r>
-              <a:rPr lang="zh-TW" altLang="en-US" smtClean="0"/>
+              <a:rPr lang="zh-TW" altLang="en-US"/>
               <a:t>第五層</a:t>
             </a:r>
-            <a:endParaRPr lang="zh-TW" altLang="en-US"/>
           </a:p>
         </p:txBody>
       </p:sp>
@@ -2700,7 +2695,7 @@
             <a:fld id="{F449C270-FC28-4AC5-8AFF-223843BA4068}" type="datetimeFigureOut">
               <a:rPr lang="zh-TW" altLang="en-US" smtClean="0"/>
               <a:pPr/>
-              <a:t>2019/9/7</a:t>
+              <a:t>2024/6/15</a:t>
             </a:fld>
             <a:endParaRPr lang="zh-TW" altLang="en-US"/>
           </a:p>
@@ -3081,259 +3076,35 @@
             <p:ph type="title"/>
           </p:nvPr>
         </p:nvSpPr>
-        <p:spPr/>
+        <p:spPr>
+          <a:xfrm>
+            <a:off x="0" y="1995686"/>
+            <a:ext cx="9144000" cy="857250"/>
+          </a:xfrm>
+        </p:spPr>
         <p:txBody>
           <a:bodyPr>
-            <a:normAutofit/>
+            <a:noAutofit/>
           </a:bodyPr>
           <a:lstStyle/>
           <a:p>
             <a:r>
-              <a:rPr lang="zh-TW" altLang="en-US" sz="4000" b="1" dirty="0">
+              <a:rPr lang="zh-TW" altLang="en-US" sz="5400" b="1" i="1" dirty="0">
                 <a:solidFill>
                   <a:srgbClr val="000066"/>
                 </a:solidFill>
+                <a:effectLst>
+                  <a:outerShdw blurRad="38100" dist="38100" dir="2700000" algn="tl">
+                    <a:srgbClr val="000000">
+                      <a:alpha val="43137"/>
+                    </a:srgbClr>
+                  </a:outerShdw>
+                </a:effectLst>
                 <a:latin typeface="微軟正黑體" pitchFamily="34" charset="-120"/>
                 <a:ea typeface="微軟正黑體" pitchFamily="34" charset="-120"/>
               </a:rPr>
               <a:t>同來讚美</a:t>
             </a:r>
-          </a:p>
-        </p:txBody>
-      </p:sp>
-      <p:sp>
-        <p:nvSpPr>
-          <p:cNvPr id="5" name="內容版面配置區 4"/>
-          <p:cNvSpPr>
-            <a:spLocks noGrp="1"/>
-          </p:cNvSpPr>
-          <p:nvPr>
-            <p:ph idx="1"/>
-          </p:nvPr>
-        </p:nvSpPr>
-        <p:spPr/>
-        <p:txBody>
-          <a:bodyPr>
-            <a:noAutofit/>
-          </a:bodyPr>
-          <a:lstStyle/>
-          <a:p>
-            <a:pPr algn="ctr">
-              <a:buNone/>
-            </a:pPr>
-            <a:r>
-              <a:rPr lang="zh-TW" altLang="en-US" sz="4800" b="1" dirty="0">
-                <a:solidFill>
-                  <a:srgbClr val="000066"/>
-                </a:solidFill>
-                <a:latin typeface="微軟正黑體" pitchFamily="34" charset="-120"/>
-                <a:ea typeface="微軟正黑體" pitchFamily="34" charset="-120"/>
-              </a:rPr>
-              <a:t>同來讚美齊共</a:t>
-            </a:r>
-            <a:r>
-              <a:rPr lang="zh-TW" altLang="en-US" sz="4800" b="1" dirty="0" smtClean="0">
-                <a:solidFill>
-                  <a:srgbClr val="000066"/>
-                </a:solidFill>
-                <a:latin typeface="微軟正黑體" pitchFamily="34" charset="-120"/>
-                <a:ea typeface="微軟正黑體" pitchFamily="34" charset="-120"/>
-              </a:rPr>
-              <a:t>唱  哈</a:t>
-            </a:r>
-            <a:r>
-              <a:rPr lang="zh-TW" altLang="en-US" sz="4800" b="1" dirty="0">
-                <a:solidFill>
-                  <a:srgbClr val="000066"/>
-                </a:solidFill>
-                <a:latin typeface="微軟正黑體" pitchFamily="34" charset="-120"/>
-                <a:ea typeface="微軟正黑體" pitchFamily="34" charset="-120"/>
-              </a:rPr>
-              <a:t>利路</a:t>
-            </a:r>
-            <a:r>
-              <a:rPr lang="zh-TW" altLang="en-US" sz="4800" b="1" dirty="0" smtClean="0">
-                <a:solidFill>
-                  <a:srgbClr val="000066"/>
-                </a:solidFill>
-                <a:latin typeface="微軟正黑體" pitchFamily="34" charset="-120"/>
-                <a:ea typeface="微軟正黑體" pitchFamily="34" charset="-120"/>
-              </a:rPr>
-              <a:t>亞</a:t>
-            </a:r>
-            <a:endParaRPr lang="en-US" altLang="zh-TW" sz="4800" b="1" dirty="0" smtClean="0">
-              <a:solidFill>
-                <a:srgbClr val="000066"/>
-              </a:solidFill>
-              <a:latin typeface="微軟正黑體" pitchFamily="34" charset="-120"/>
-              <a:ea typeface="微軟正黑體" pitchFamily="34" charset="-120"/>
-            </a:endParaRPr>
-          </a:p>
-          <a:p>
-            <a:pPr algn="ctr">
-              <a:buNone/>
-            </a:pPr>
-            <a:r>
-              <a:rPr lang="zh-TW" altLang="en-US" sz="4800" b="1" dirty="0" smtClean="0">
-                <a:solidFill>
-                  <a:srgbClr val="000066"/>
-                </a:solidFill>
-                <a:latin typeface="微軟正黑體" pitchFamily="34" charset="-120"/>
-                <a:ea typeface="微軟正黑體" pitchFamily="34" charset="-120"/>
-              </a:rPr>
-              <a:t>唱</a:t>
-            </a:r>
-            <a:r>
-              <a:rPr lang="zh-TW" altLang="en-US" sz="4800" b="1" dirty="0">
-                <a:solidFill>
-                  <a:srgbClr val="000066"/>
-                </a:solidFill>
-                <a:latin typeface="微軟正黑體" pitchFamily="34" charset="-120"/>
-                <a:ea typeface="微軟正黑體" pitchFamily="34" charset="-120"/>
-              </a:rPr>
-              <a:t>出生命的</a:t>
-            </a:r>
-            <a:r>
-              <a:rPr lang="zh-TW" altLang="en-US" sz="4800" b="1" dirty="0" smtClean="0">
-                <a:solidFill>
-                  <a:srgbClr val="000066"/>
-                </a:solidFill>
-                <a:latin typeface="微軟正黑體" pitchFamily="34" charset="-120"/>
-                <a:ea typeface="微軟正黑體" pitchFamily="34" charset="-120"/>
-              </a:rPr>
-              <a:t>歌</a:t>
-            </a:r>
-            <a:endParaRPr lang="en-US" altLang="zh-TW" sz="4800" b="1" dirty="0" smtClean="0">
-              <a:solidFill>
-                <a:srgbClr val="000066"/>
-              </a:solidFill>
-              <a:latin typeface="微軟正黑體" pitchFamily="34" charset="-120"/>
-              <a:ea typeface="微軟正黑體" pitchFamily="34" charset="-120"/>
-            </a:endParaRPr>
-          </a:p>
-          <a:p>
-            <a:pPr algn="ctr">
-              <a:buNone/>
-            </a:pPr>
-            <a:r>
-              <a:rPr lang="zh-TW" altLang="en-US" sz="4800" b="1" dirty="0" smtClean="0">
-                <a:solidFill>
-                  <a:srgbClr val="000066"/>
-                </a:solidFill>
-                <a:latin typeface="微軟正黑體" pitchFamily="34" charset="-120"/>
-                <a:ea typeface="微軟正黑體" pitchFamily="34" charset="-120"/>
-              </a:rPr>
-              <a:t>同</a:t>
-            </a:r>
-            <a:r>
-              <a:rPr lang="zh-TW" altLang="en-US" sz="4800" b="1" dirty="0">
-                <a:solidFill>
-                  <a:srgbClr val="000066"/>
-                </a:solidFill>
-                <a:latin typeface="微軟正黑體" pitchFamily="34" charset="-120"/>
-                <a:ea typeface="微軟正黑體" pitchFamily="34" charset="-120"/>
-              </a:rPr>
-              <a:t>來讚美齊共</a:t>
-            </a:r>
-            <a:r>
-              <a:rPr lang="zh-TW" altLang="en-US" sz="4800" b="1" dirty="0" smtClean="0">
-                <a:solidFill>
-                  <a:srgbClr val="000066"/>
-                </a:solidFill>
-                <a:latin typeface="微軟正黑體" pitchFamily="34" charset="-120"/>
-                <a:ea typeface="微軟正黑體" pitchFamily="34" charset="-120"/>
-              </a:rPr>
-              <a:t>唱</a:t>
-            </a:r>
-            <a:r>
-              <a:rPr lang="en-US" altLang="zh-TW" sz="4800" b="1" dirty="0" smtClean="0">
-                <a:solidFill>
-                  <a:srgbClr val="000066"/>
-                </a:solidFill>
-                <a:latin typeface="微軟正黑體" pitchFamily="34" charset="-120"/>
-                <a:ea typeface="微軟正黑體" pitchFamily="34" charset="-120"/>
-              </a:rPr>
-              <a:t>  </a:t>
-            </a:r>
-            <a:r>
-              <a:rPr lang="zh-TW" altLang="en-US" sz="4800" b="1" dirty="0" smtClean="0">
-                <a:solidFill>
-                  <a:srgbClr val="000066"/>
-                </a:solidFill>
-                <a:latin typeface="微軟正黑體" pitchFamily="34" charset="-120"/>
-                <a:ea typeface="微軟正黑體" pitchFamily="34" charset="-120"/>
-              </a:rPr>
-              <a:t>哈</a:t>
-            </a:r>
-            <a:r>
-              <a:rPr lang="zh-TW" altLang="en-US" sz="4800" b="1" dirty="0">
-                <a:solidFill>
-                  <a:srgbClr val="000066"/>
-                </a:solidFill>
-                <a:latin typeface="微軟正黑體" pitchFamily="34" charset="-120"/>
-                <a:ea typeface="微軟正黑體" pitchFamily="34" charset="-120"/>
-              </a:rPr>
-              <a:t>利路</a:t>
-            </a:r>
-            <a:r>
-              <a:rPr lang="zh-TW" altLang="en-US" sz="4800" b="1" dirty="0" smtClean="0">
-                <a:solidFill>
-                  <a:srgbClr val="000066"/>
-                </a:solidFill>
-                <a:latin typeface="微軟正黑體" pitchFamily="34" charset="-120"/>
-                <a:ea typeface="微軟正黑體" pitchFamily="34" charset="-120"/>
-              </a:rPr>
-              <a:t>亞  </a:t>
-            </a:r>
-            <a:endParaRPr lang="en-US" altLang="zh-TW" sz="4800" b="1" dirty="0" smtClean="0">
-              <a:solidFill>
-                <a:srgbClr val="000066"/>
-              </a:solidFill>
-              <a:latin typeface="微軟正黑體" pitchFamily="34" charset="-120"/>
-              <a:ea typeface="微軟正黑體" pitchFamily="34" charset="-120"/>
-            </a:endParaRPr>
-          </a:p>
-          <a:p>
-            <a:pPr algn="ctr">
-              <a:buNone/>
-            </a:pPr>
-            <a:r>
-              <a:rPr lang="zh-TW" altLang="en-US" sz="4800" b="1" dirty="0" smtClean="0">
-                <a:solidFill>
-                  <a:srgbClr val="000066"/>
-                </a:solidFill>
-                <a:latin typeface="微軟正黑體" pitchFamily="34" charset="-120"/>
-                <a:ea typeface="微軟正黑體" pitchFamily="34" charset="-120"/>
-              </a:rPr>
-              <a:t>唱</a:t>
-            </a:r>
-            <a:r>
-              <a:rPr lang="zh-TW" altLang="en-US" sz="4800" b="1" dirty="0">
-                <a:solidFill>
-                  <a:srgbClr val="000066"/>
-                </a:solidFill>
-                <a:latin typeface="微軟正黑體" pitchFamily="34" charset="-120"/>
-                <a:ea typeface="微軟正黑體" pitchFamily="34" charset="-120"/>
-              </a:rPr>
-              <a:t>出生命的</a:t>
-            </a:r>
-            <a:r>
-              <a:rPr lang="zh-TW" altLang="en-US" sz="4800" b="1" dirty="0" smtClean="0">
-                <a:solidFill>
-                  <a:srgbClr val="000066"/>
-                </a:solidFill>
-                <a:latin typeface="微軟正黑體" pitchFamily="34" charset="-120"/>
-                <a:ea typeface="微軟正黑體" pitchFamily="34" charset="-120"/>
-              </a:rPr>
-              <a:t>歌</a:t>
-            </a:r>
-            <a:endParaRPr lang="zh-TW" altLang="en-US" sz="4800" b="1" dirty="0">
-              <a:solidFill>
-                <a:srgbClr val="000066"/>
-              </a:solidFill>
-              <a:latin typeface="微軟正黑體" pitchFamily="34" charset="-120"/>
-              <a:ea typeface="微軟正黑體" pitchFamily="34" charset="-120"/>
-            </a:endParaRPr>
           </a:p>
         </p:txBody>
       </p:sp>
@@ -3364,63 +3135,38 @@
       </p:grpSpPr>
       <p:sp>
         <p:nvSpPr>
-          <p:cNvPr id="4" name="標題 3"/>
-          <p:cNvSpPr>
-            <a:spLocks noGrp="1"/>
-          </p:cNvSpPr>
-          <p:nvPr>
-            <p:ph type="title"/>
-          </p:nvPr>
-        </p:nvSpPr>
-        <p:spPr/>
-        <p:txBody>
-          <a:bodyPr>
+          <p:cNvPr id="5" name="內容版面配置區 4"/>
+          <p:cNvSpPr>
+            <a:spLocks noGrp="1"/>
+          </p:cNvSpPr>
+          <p:nvPr>
+            <p:ph idx="1"/>
+          </p:nvPr>
+        </p:nvSpPr>
+        <p:spPr>
+          <a:xfrm>
+            <a:off x="0" y="1563638"/>
+            <a:ext cx="9144000" cy="1803647"/>
+          </a:xfrm>
+        </p:spPr>
+        <p:txBody>
+          <a:bodyPr anchor="ctr">
             <a:normAutofit/>
           </a:bodyPr>
           <a:lstStyle/>
           <a:p>
-            <a:r>
-              <a:rPr lang="zh-TW" altLang="en-US" sz="4000" b="1" dirty="0">
+            <a:pPr algn="ctr">
+              <a:buNone/>
+            </a:pPr>
+            <a:r>
+              <a:rPr lang="zh-TW" altLang="en-US" sz="4800" b="1" dirty="0">
                 <a:solidFill>
                   <a:srgbClr val="000066"/>
                 </a:solidFill>
                 <a:latin typeface="微軟正黑體" pitchFamily="34" charset="-120"/>
                 <a:ea typeface="微軟正黑體" pitchFamily="34" charset="-120"/>
               </a:rPr>
-              <a:t>同來讚美</a:t>
-            </a:r>
-          </a:p>
-        </p:txBody>
-      </p:sp>
-      <p:sp>
-        <p:nvSpPr>
-          <p:cNvPr id="5" name="內容版面配置區 4"/>
-          <p:cNvSpPr>
-            <a:spLocks noGrp="1"/>
-          </p:cNvSpPr>
-          <p:nvPr>
-            <p:ph idx="1"/>
-          </p:nvPr>
-        </p:nvSpPr>
-        <p:spPr/>
-        <p:txBody>
-          <a:bodyPr>
-            <a:noAutofit/>
-          </a:bodyPr>
-          <a:lstStyle/>
-          <a:p>
-            <a:pPr algn="ctr">
-              <a:buNone/>
-            </a:pPr>
-            <a:r>
-              <a:rPr lang="zh-TW" altLang="en-US" sz="4800" b="1" dirty="0">
-                <a:solidFill>
-                  <a:srgbClr val="000066"/>
-                </a:solidFill>
-                <a:latin typeface="微軟正黑體" pitchFamily="34" charset="-120"/>
-                <a:ea typeface="微軟正黑體" pitchFamily="34" charset="-120"/>
-              </a:rPr>
-              <a:t>懷著滿信念</a:t>
+              <a:t>同來讚美齊共唱</a:t>
             </a:r>
             <a:r>
               <a:rPr lang="en-US" altLang="zh-TW" sz="4800" b="1" dirty="0">
@@ -3440,7 +3186,7 @@
                 <a:latin typeface="微軟正黑體" pitchFamily="34" charset="-120"/>
                 <a:ea typeface="微軟正黑體" pitchFamily="34" charset="-120"/>
               </a:rPr>
-              <a:t>一生不改變</a:t>
+              <a:t>哈利路亞  </a:t>
             </a:r>
             <a:endParaRPr lang="en-US" altLang="zh-TW" sz="4800" b="1" dirty="0">
               <a:solidFill>
@@ -3462,56 +3208,119 @@
                 <a:latin typeface="微軟正黑體" pitchFamily="34" charset="-120"/>
                 <a:ea typeface="微軟正黑體" pitchFamily="34" charset="-120"/>
               </a:rPr>
-              <a:t>靠恩主引導每天</a:t>
-            </a:r>
-            <a:endParaRPr lang="en-US" altLang="zh-TW" sz="4800" b="1" dirty="0">
+              <a:t>唱出生命的歌</a:t>
+            </a:r>
+          </a:p>
+        </p:txBody>
+      </p:sp>
+      <p:sp>
+        <p:nvSpPr>
+          <p:cNvPr id="3" name="TextBox 2"/>
+          <p:cNvSpPr txBox="1"/>
+          <p:nvPr/>
+        </p:nvSpPr>
+        <p:spPr>
+          <a:xfrm>
+            <a:off x="0" y="3867894"/>
+            <a:ext cx="9144000" cy="461665"/>
+          </a:xfrm>
+          <a:prstGeom prst="rect">
+            <a:avLst/>
+          </a:prstGeom>
+          <a:noFill/>
+        </p:spPr>
+        <p:txBody>
+          <a:bodyPr wrap="square" rtlCol="0">
+            <a:spAutoFit/>
+          </a:bodyPr>
+          <a:lstStyle/>
+          <a:p>
+            <a:pPr algn="ctr"/>
+            <a:r>
+              <a:rPr lang="en-US" sz="2400" b="1" dirty="0">
+                <a:solidFill>
+                  <a:srgbClr val="000066"/>
+                </a:solidFill>
+                <a:latin typeface="Microsoft JhengHei" panose="020B0604030504040204" pitchFamily="34" charset="-120"/>
+                <a:ea typeface="Microsoft JhengHei" panose="020B0604030504040204" pitchFamily="34" charset="-120"/>
+              </a:rPr>
+              <a:t>( </a:t>
+            </a:r>
+            <a:r>
+              <a:rPr lang="zh-CN" altLang="en-US" sz="2400" b="1" dirty="0">
+                <a:solidFill>
+                  <a:srgbClr val="000066"/>
+                </a:solidFill>
+                <a:latin typeface="Microsoft JhengHei" panose="020B0604030504040204" pitchFamily="34" charset="-120"/>
+                <a:ea typeface="Microsoft JhengHei" panose="020B0604030504040204" pitchFamily="34" charset="-120"/>
+              </a:rPr>
+              <a:t>正歌 </a:t>
+            </a:r>
+            <a:r>
+              <a:rPr lang="en-US" altLang="zh-CN" sz="2400" b="1" dirty="0">
+                <a:solidFill>
+                  <a:srgbClr val="000066"/>
+                </a:solidFill>
+                <a:latin typeface="Microsoft JhengHei" panose="020B0604030504040204" pitchFamily="34" charset="-120"/>
+                <a:ea typeface="Microsoft JhengHei" panose="020B0604030504040204" pitchFamily="34" charset="-120"/>
+              </a:rPr>
+              <a:t>1</a:t>
+            </a:r>
+            <a:r>
+              <a:rPr lang="en-US" sz="2400" b="1" dirty="0">
+                <a:solidFill>
+                  <a:srgbClr val="000066"/>
+                </a:solidFill>
+                <a:latin typeface="Microsoft JhengHei" panose="020B0604030504040204" pitchFamily="34" charset="-120"/>
+                <a:ea typeface="Microsoft JhengHei" panose="020B0604030504040204" pitchFamily="34" charset="-120"/>
+              </a:rPr>
+              <a:t> )</a:t>
+            </a:r>
+            <a:r>
+              <a:rPr lang="zh-CN" altLang="en-US" sz="2400" b="1" dirty="0">
+                <a:solidFill>
+                  <a:srgbClr val="000066"/>
+                </a:solidFill>
+                <a:latin typeface="Microsoft JhengHei" panose="020B0604030504040204" pitchFamily="34" charset="-120"/>
+                <a:ea typeface="Microsoft JhengHei" panose="020B0604030504040204" pitchFamily="34" charset="-120"/>
+              </a:rPr>
+              <a:t>（</a:t>
+            </a:r>
+            <a:r>
+              <a:rPr lang="en-US" altLang="zh-CN" sz="2400" b="1" dirty="0">
+                <a:solidFill>
+                  <a:srgbClr val="000066"/>
+                </a:solidFill>
+                <a:latin typeface="Microsoft JhengHei" panose="020B0604030504040204" pitchFamily="34" charset="-120"/>
+                <a:ea typeface="Microsoft JhengHei" panose="020B0604030504040204" pitchFamily="34" charset="-120"/>
+              </a:rPr>
+              <a:t>2</a:t>
+            </a:r>
+            <a:r>
+              <a:rPr lang="zh-CN" altLang="en-US" sz="2400" b="1" dirty="0">
+                <a:solidFill>
+                  <a:srgbClr val="000066"/>
+                </a:solidFill>
+                <a:latin typeface="Microsoft JhengHei" panose="020B0604030504040204" pitchFamily="34" charset="-120"/>
+                <a:ea typeface="Microsoft JhengHei" panose="020B0604030504040204" pitchFamily="34" charset="-120"/>
+              </a:rPr>
+              <a:t>次）</a:t>
+            </a:r>
+            <a:endParaRPr lang="vi-VN" sz="2400" b="1" dirty="0">
               <a:solidFill>
                 <a:srgbClr val="000066"/>
               </a:solidFill>
-              <a:latin typeface="微軟正黑體" pitchFamily="34" charset="-120"/>
-              <a:ea typeface="微軟正黑體" pitchFamily="34" charset="-120"/>
+              <a:ea typeface="Microsoft JhengHei" panose="020B0604030504040204" pitchFamily="34" charset="-120"/>
             </a:endParaRPr>
           </a:p>
-          <a:p>
-            <a:pPr algn="ctr">
-              <a:buNone/>
-            </a:pPr>
-            <a:r>
-              <a:rPr lang="zh-TW" altLang="en-US" sz="4800" b="1" dirty="0">
-                <a:solidFill>
-                  <a:srgbClr val="000066"/>
-                </a:solidFill>
-                <a:latin typeface="微軟正黑體" pitchFamily="34" charset="-120"/>
-                <a:ea typeface="微軟正黑體" pitchFamily="34" charset="-120"/>
-              </a:rPr>
-              <a:t>前路滿盼望  歡欣將心獻</a:t>
-            </a:r>
-            <a:endParaRPr lang="en-US" altLang="zh-TW" sz="4800" b="1" dirty="0">
-              <a:solidFill>
-                <a:srgbClr val="000066"/>
-              </a:solidFill>
-              <a:latin typeface="微軟正黑體" pitchFamily="34" charset="-120"/>
-              <a:ea typeface="微軟正黑體" pitchFamily="34" charset="-120"/>
-            </a:endParaRPr>
-          </a:p>
-          <a:p>
-            <a:pPr algn="ctr">
-              <a:buNone/>
-            </a:pPr>
-            <a:r>
-              <a:rPr lang="zh-TW" altLang="en-US" sz="4800" b="1" dirty="0">
-                <a:solidFill>
-                  <a:srgbClr val="000066"/>
-                </a:solidFill>
-                <a:latin typeface="微軟正黑體" pitchFamily="34" charset="-120"/>
-                <a:ea typeface="微軟正黑體" pitchFamily="34" charset="-120"/>
-              </a:rPr>
-              <a:t>願恩主每日記念</a:t>
-            </a:r>
-          </a:p>
         </p:txBody>
       </p:sp>
     </p:spTree>
+    <p:extLst>
+      <p:ext uri="{BB962C8B-B14F-4D97-AF65-F5344CB8AC3E}">
+        <p14:creationId xmlns:p14="http://schemas.microsoft.com/office/powerpoint/2010/main" val="4267392937"/>
+      </p:ext>
+    </p:extLst>
   </p:cSld>
   <p:clrMapOvr>
     <a:masterClrMapping/>
@@ -3538,63 +3347,48 @@
       </p:grpSpPr>
       <p:sp>
         <p:nvSpPr>
-          <p:cNvPr id="4" name="標題 3"/>
-          <p:cNvSpPr>
-            <a:spLocks noGrp="1"/>
-          </p:cNvSpPr>
-          <p:nvPr>
-            <p:ph type="title"/>
-          </p:nvPr>
-        </p:nvSpPr>
-        <p:spPr/>
-        <p:txBody>
-          <a:bodyPr>
+          <p:cNvPr id="5" name="內容版面配置區 4"/>
+          <p:cNvSpPr>
+            <a:spLocks noGrp="1"/>
+          </p:cNvSpPr>
+          <p:nvPr>
+            <p:ph idx="1"/>
+          </p:nvPr>
+        </p:nvSpPr>
+        <p:spPr>
+          <a:xfrm>
+            <a:off x="0" y="1563638"/>
+            <a:ext cx="9144000" cy="1803647"/>
+          </a:xfrm>
+        </p:spPr>
+        <p:txBody>
+          <a:bodyPr anchor="ctr">
             <a:normAutofit/>
           </a:bodyPr>
           <a:lstStyle/>
           <a:p>
-            <a:r>
-              <a:rPr lang="zh-TW" altLang="en-US" sz="4000" b="1" dirty="0">
+            <a:pPr algn="ctr">
+              <a:buNone/>
+            </a:pPr>
+            <a:r>
+              <a:rPr lang="zh-TW" altLang="en-US" sz="4800" b="1" dirty="0">
                 <a:solidFill>
                   <a:srgbClr val="000066"/>
                 </a:solidFill>
                 <a:latin typeface="微軟正黑體" pitchFamily="34" charset="-120"/>
                 <a:ea typeface="微軟正黑體" pitchFamily="34" charset="-120"/>
               </a:rPr>
-              <a:t>同來讚美</a:t>
-            </a:r>
-          </a:p>
-        </p:txBody>
-      </p:sp>
-      <p:sp>
-        <p:nvSpPr>
-          <p:cNvPr id="5" name="內容版面配置區 4"/>
-          <p:cNvSpPr>
-            <a:spLocks noGrp="1"/>
-          </p:cNvSpPr>
-          <p:nvPr>
-            <p:ph idx="1"/>
-          </p:nvPr>
-        </p:nvSpPr>
-        <p:spPr/>
-        <p:txBody>
-          <a:bodyPr>
-            <a:noAutofit/>
-          </a:bodyPr>
-          <a:lstStyle/>
-          <a:p>
-            <a:pPr algn="ctr">
-              <a:buNone/>
-            </a:pPr>
-            <a:r>
-              <a:rPr lang="zh-TW" altLang="en-US" sz="4800" b="1" dirty="0">
+              <a:t>懷著滿信念</a:t>
+            </a:r>
+            <a:r>
+              <a:rPr lang="en-US" altLang="zh-TW" sz="4800" b="1" dirty="0">
                 <a:solidFill>
                   <a:srgbClr val="000066"/>
                 </a:solidFill>
                 <a:latin typeface="微軟正黑體" pitchFamily="34" charset="-120"/>
                 <a:ea typeface="微軟正黑體" pitchFamily="34" charset="-120"/>
               </a:rPr>
-              <a:t>同來讚美齊</a:t>
+              <a:t>  </a:t>
             </a:r>
             <a:r>
               <a:rPr lang="zh-TW" altLang="en-US" sz="4800" b="1" dirty="0">
@@ -3604,47 +3398,7 @@
                 <a:latin typeface="微軟正黑體" pitchFamily="34" charset="-120"/>
                 <a:ea typeface="微軟正黑體" pitchFamily="34" charset="-120"/>
               </a:rPr>
-              <a:t>共</a:t>
-            </a:r>
-            <a:r>
-              <a:rPr lang="zh-CN" altLang="en-US" sz="4800" b="1" dirty="0">
-                <a:solidFill>
-                  <a:srgbClr val="000066"/>
-                </a:solidFill>
-                <a:latin typeface="微軟正黑體" pitchFamily="34" charset="-120"/>
-                <a:ea typeface="微軟正黑體" pitchFamily="34" charset="-120"/>
-              </a:rPr>
-              <a:t>跳</a:t>
-            </a:r>
-            <a:r>
-              <a:rPr lang="zh-TW" altLang="en-US" sz="4800" b="1" dirty="0">
-                <a:solidFill>
-                  <a:srgbClr val="000066"/>
-                </a:solidFill>
-                <a:latin typeface="微軟正黑體" pitchFamily="34" charset="-120"/>
-                <a:ea typeface="微軟正黑體" pitchFamily="34" charset="-120"/>
-              </a:rPr>
-              <a:t>  哈</a:t>
-            </a:r>
-            <a:r>
-              <a:rPr lang="zh-TW" altLang="en-US" sz="4800" b="1" dirty="0">
-                <a:solidFill>
-                  <a:srgbClr val="000066"/>
-                </a:solidFill>
-                <a:latin typeface="微軟正黑體" pitchFamily="34" charset="-120"/>
-                <a:ea typeface="微軟正黑體" pitchFamily="34" charset="-120"/>
-              </a:rPr>
-              <a:t>利路</a:t>
-            </a:r>
-            <a:r>
-              <a:rPr lang="zh-TW" altLang="en-US" sz="4800" b="1" dirty="0">
-                <a:solidFill>
-                  <a:srgbClr val="000066"/>
-                </a:solidFill>
-                <a:latin typeface="微軟正黑體" pitchFamily="34" charset="-120"/>
-                <a:ea typeface="微軟正黑體" pitchFamily="34" charset="-120"/>
-              </a:rPr>
-              <a:t>亞</a:t>
+              <a:t>一生不改變</a:t>
             </a:r>
             <a:endParaRPr lang="en-US" altLang="zh-TW" sz="4800" b="1" dirty="0">
               <a:solidFill>
@@ -3659,54 +3413,14 @@
               <a:buNone/>
             </a:pPr>
             <a:r>
-              <a:rPr lang="zh-CN" altLang="en-US" sz="4800" b="1" dirty="0">
+              <a:rPr lang="zh-TW" altLang="en-US" sz="4800" b="1" dirty="0">
                 <a:solidFill>
                   <a:srgbClr val="000066"/>
                 </a:solidFill>
                 <a:latin typeface="微軟正黑體" pitchFamily="34" charset="-120"/>
                 <a:ea typeface="微軟正黑體" pitchFamily="34" charset="-120"/>
               </a:rPr>
-              <a:t>跳</a:t>
-            </a:r>
-            <a:r>
-              <a:rPr lang="zh-TW" altLang="en-US" sz="4800" b="1" dirty="0">
-                <a:solidFill>
-                  <a:srgbClr val="000066"/>
-                </a:solidFill>
-                <a:latin typeface="微軟正黑體" pitchFamily="34" charset="-120"/>
-                <a:ea typeface="微軟正黑體" pitchFamily="34" charset="-120"/>
-              </a:rPr>
-              <a:t>出</a:t>
-            </a:r>
-            <a:r>
-              <a:rPr lang="zh-TW" altLang="en-US" sz="4800" b="1" dirty="0">
-                <a:solidFill>
-                  <a:srgbClr val="000066"/>
-                </a:solidFill>
-                <a:latin typeface="微軟正黑體" pitchFamily="34" charset="-120"/>
-                <a:ea typeface="微軟正黑體" pitchFamily="34" charset="-120"/>
-              </a:rPr>
-              <a:t>生命</a:t>
-            </a:r>
-            <a:r>
-              <a:rPr lang="zh-TW" altLang="en-US" sz="4800" b="1" dirty="0">
-                <a:solidFill>
-                  <a:srgbClr val="000066"/>
-                </a:solidFill>
-                <a:latin typeface="微軟正黑體" pitchFamily="34" charset="-120"/>
-                <a:ea typeface="微軟正黑體" pitchFamily="34" charset="-120"/>
-              </a:rPr>
-              <a:t>的</a:t>
-            </a:r>
-            <a:r>
-              <a:rPr lang="zh-CN" altLang="en-US" sz="4800" b="1" dirty="0">
-                <a:solidFill>
-                  <a:srgbClr val="000066"/>
-                </a:solidFill>
-                <a:latin typeface="微軟正黑體" pitchFamily="34" charset="-120"/>
-                <a:ea typeface="微軟正黑體" pitchFamily="34" charset="-120"/>
-              </a:rPr>
-              <a:t>舞</a:t>
+              <a:t>靠恩主引導每天</a:t>
             </a:r>
             <a:endParaRPr lang="en-US" altLang="zh-TW" sz="4800" b="1" dirty="0">
               <a:solidFill>
@@ -3716,153 +3430,76 @@
               <a:ea typeface="微軟正黑體" pitchFamily="34" charset="-120"/>
             </a:endParaRPr>
           </a:p>
-          <a:p>
-            <a:pPr algn="ctr">
-              <a:buNone/>
-            </a:pPr>
-            <a:r>
-              <a:rPr lang="zh-TW" altLang="en-US" sz="4800" b="1" dirty="0">
+        </p:txBody>
+      </p:sp>
+      <p:sp>
+        <p:nvSpPr>
+          <p:cNvPr id="3" name="TextBox 2"/>
+          <p:cNvSpPr txBox="1"/>
+          <p:nvPr/>
+        </p:nvSpPr>
+        <p:spPr>
+          <a:xfrm>
+            <a:off x="0" y="3867894"/>
+            <a:ext cx="9144000" cy="461665"/>
+          </a:xfrm>
+          <a:prstGeom prst="rect">
+            <a:avLst/>
+          </a:prstGeom>
+          <a:noFill/>
+        </p:spPr>
+        <p:txBody>
+          <a:bodyPr wrap="square" rtlCol="0">
+            <a:spAutoFit/>
+          </a:bodyPr>
+          <a:lstStyle/>
+          <a:p>
+            <a:pPr algn="ctr"/>
+            <a:r>
+              <a:rPr lang="en-US" sz="2400" b="1" dirty="0">
                 <a:solidFill>
                   <a:srgbClr val="000066"/>
                 </a:solidFill>
-                <a:latin typeface="微軟正黑體" pitchFamily="34" charset="-120"/>
-                <a:ea typeface="微軟正黑體" pitchFamily="34" charset="-120"/>
+                <a:latin typeface="Microsoft JhengHei" panose="020B0604030504040204" pitchFamily="34" charset="-120"/>
+                <a:ea typeface="Microsoft JhengHei" panose="020B0604030504040204" pitchFamily="34" charset="-120"/>
               </a:rPr>
-              <a:t>同</a:t>
-            </a:r>
-            <a:r>
-              <a:rPr lang="zh-TW" altLang="en-US" sz="4800" b="1" dirty="0">
+              <a:t>( </a:t>
+            </a:r>
+            <a:r>
+              <a:rPr lang="zh-CN" altLang="en-US" sz="2400" b="1" dirty="0">
                 <a:solidFill>
                   <a:srgbClr val="000066"/>
                 </a:solidFill>
-                <a:latin typeface="微軟正黑體" pitchFamily="34" charset="-120"/>
-                <a:ea typeface="微軟正黑體" pitchFamily="34" charset="-120"/>
+                <a:latin typeface="Microsoft JhengHei" panose="020B0604030504040204" pitchFamily="34" charset="-120"/>
+                <a:ea typeface="Microsoft JhengHei" panose="020B0604030504040204" pitchFamily="34" charset="-120"/>
               </a:rPr>
-              <a:t>來讚美齊</a:t>
-            </a:r>
-            <a:r>
-              <a:rPr lang="zh-TW" altLang="en-US" sz="4800" b="1" dirty="0">
+              <a:t>副歌</a:t>
+            </a:r>
+            <a:r>
+              <a:rPr lang="en-US" sz="2400" b="1" dirty="0">
                 <a:solidFill>
                   <a:srgbClr val="000066"/>
                 </a:solidFill>
-                <a:latin typeface="微軟正黑體" pitchFamily="34" charset="-120"/>
-                <a:ea typeface="微軟正黑體" pitchFamily="34" charset="-120"/>
+                <a:latin typeface="Microsoft JhengHei" panose="020B0604030504040204" pitchFamily="34" charset="-120"/>
+                <a:ea typeface="Microsoft JhengHei" panose="020B0604030504040204" pitchFamily="34" charset="-120"/>
               </a:rPr>
-              <a:t>共</a:t>
-            </a:r>
-            <a:r>
-              <a:rPr lang="zh-CN" altLang="en-US" sz="4800" b="1" dirty="0">
-                <a:solidFill>
-                  <a:srgbClr val="000066"/>
-                </a:solidFill>
-                <a:latin typeface="微軟正黑體" pitchFamily="34" charset="-120"/>
-                <a:ea typeface="微軟正黑體" pitchFamily="34" charset="-120"/>
-              </a:rPr>
-              <a:t>跳</a:t>
-            </a:r>
-            <a:r>
-              <a:rPr lang="en-US" altLang="zh-CN" sz="4800" b="1" dirty="0">
-                <a:solidFill>
-                  <a:srgbClr val="000066"/>
-                </a:solidFill>
-                <a:latin typeface="微軟正黑體" pitchFamily="34" charset="-120"/>
-                <a:ea typeface="微軟正黑體" pitchFamily="34" charset="-120"/>
-              </a:rPr>
-              <a:t>  </a:t>
-            </a:r>
-            <a:r>
-              <a:rPr lang="zh-TW" altLang="en-US" sz="4800" b="1" dirty="0">
-                <a:solidFill>
-                  <a:srgbClr val="000066"/>
-                </a:solidFill>
-                <a:latin typeface="微軟正黑體" pitchFamily="34" charset="-120"/>
-                <a:ea typeface="微軟正黑體" pitchFamily="34" charset="-120"/>
-              </a:rPr>
-              <a:t>哈</a:t>
-            </a:r>
-            <a:r>
-              <a:rPr lang="zh-TW" altLang="en-US" sz="4800" b="1" dirty="0">
-                <a:solidFill>
-                  <a:srgbClr val="000066"/>
-                </a:solidFill>
-                <a:latin typeface="微軟正黑體" pitchFamily="34" charset="-120"/>
-                <a:ea typeface="微軟正黑體" pitchFamily="34" charset="-120"/>
-              </a:rPr>
-              <a:t>利路</a:t>
-            </a:r>
-            <a:r>
-              <a:rPr lang="zh-TW" altLang="en-US" sz="4800" b="1" dirty="0">
-                <a:solidFill>
-                  <a:srgbClr val="000066"/>
-                </a:solidFill>
-                <a:latin typeface="微軟正黑體" pitchFamily="34" charset="-120"/>
-                <a:ea typeface="微軟正黑體" pitchFamily="34" charset="-120"/>
-              </a:rPr>
-              <a:t>亞</a:t>
-            </a:r>
-            <a:endParaRPr lang="en-US" altLang="zh-TW" sz="4800" b="1" dirty="0">
+              <a:t> )</a:t>
+            </a:r>
+            <a:endParaRPr lang="vi-VN" sz="2400" b="1" dirty="0">
               <a:solidFill>
                 <a:srgbClr val="000066"/>
               </a:solidFill>
-              <a:latin typeface="微軟正黑體" pitchFamily="34" charset="-120"/>
-              <a:ea typeface="微軟正黑體" pitchFamily="34" charset="-120"/>
+              <a:ea typeface="Microsoft JhengHei" panose="020B0604030504040204" pitchFamily="34" charset="-120"/>
             </a:endParaRPr>
           </a:p>
-          <a:p>
-            <a:pPr algn="ctr">
-              <a:buNone/>
-            </a:pPr>
-            <a:r>
-              <a:rPr lang="zh-CN" altLang="en-US" sz="4800" b="1" dirty="0">
-                <a:solidFill>
-                  <a:srgbClr val="000066"/>
-                </a:solidFill>
-                <a:latin typeface="微軟正黑體" pitchFamily="34" charset="-120"/>
-                <a:ea typeface="微軟正黑體" pitchFamily="34" charset="-120"/>
-              </a:rPr>
-              <a:t>跳</a:t>
-            </a:r>
-            <a:r>
-              <a:rPr lang="zh-TW" altLang="en-US" sz="4800" b="1" dirty="0">
-                <a:solidFill>
-                  <a:srgbClr val="000066"/>
-                </a:solidFill>
-                <a:latin typeface="微軟正黑體" pitchFamily="34" charset="-120"/>
-                <a:ea typeface="微軟正黑體" pitchFamily="34" charset="-120"/>
-              </a:rPr>
-              <a:t>出</a:t>
-            </a:r>
-            <a:r>
-              <a:rPr lang="zh-TW" altLang="en-US" sz="4800" b="1" dirty="0">
-                <a:solidFill>
-                  <a:srgbClr val="000066"/>
-                </a:solidFill>
-                <a:latin typeface="微軟正黑體" pitchFamily="34" charset="-120"/>
-                <a:ea typeface="微軟正黑體" pitchFamily="34" charset="-120"/>
-              </a:rPr>
-              <a:t>生命的</a:t>
-            </a:r>
-            <a:r>
-              <a:rPr lang="zh-TW" altLang="en-US" sz="4800" b="1" dirty="0">
-                <a:solidFill>
-                  <a:srgbClr val="000066"/>
-                </a:solidFill>
-                <a:latin typeface="微軟正黑體" pitchFamily="34" charset="-120"/>
-                <a:ea typeface="微軟正黑體" pitchFamily="34" charset="-120"/>
-              </a:rPr>
-              <a:t>歌</a:t>
-            </a:r>
-            <a:endParaRPr lang="zh-TW" altLang="en-US" sz="4800" b="1" dirty="0">
-              <a:solidFill>
-                <a:srgbClr val="000066"/>
-              </a:solidFill>
-              <a:latin typeface="微軟正黑體" pitchFamily="34" charset="-120"/>
-              <a:ea typeface="微軟正黑體" pitchFamily="34" charset="-120"/>
-            </a:endParaRPr>
-          </a:p>
         </p:txBody>
       </p:sp>
     </p:spTree>
+    <p:extLst>
+      <p:ext uri="{BB962C8B-B14F-4D97-AF65-F5344CB8AC3E}">
+        <p14:creationId xmlns:p14="http://schemas.microsoft.com/office/powerpoint/2010/main" val="4052916850"/>
+      </p:ext>
+    </p:extLst>
   </p:cSld>
   <p:clrMapOvr>
     <a:masterClrMapping/>
@@ -3889,83 +3526,38 @@
       </p:grpSpPr>
       <p:sp>
         <p:nvSpPr>
-          <p:cNvPr id="4" name="標題 3"/>
-          <p:cNvSpPr>
-            <a:spLocks noGrp="1"/>
-          </p:cNvSpPr>
-          <p:nvPr>
-            <p:ph type="title"/>
-          </p:nvPr>
-        </p:nvSpPr>
-        <p:spPr/>
-        <p:txBody>
-          <a:bodyPr>
+          <p:cNvPr id="5" name="內容版面配置區 4"/>
+          <p:cNvSpPr>
+            <a:spLocks noGrp="1"/>
+          </p:cNvSpPr>
+          <p:nvPr>
+            <p:ph idx="1"/>
+          </p:nvPr>
+        </p:nvSpPr>
+        <p:spPr>
+          <a:xfrm>
+            <a:off x="0" y="1563638"/>
+            <a:ext cx="9144000" cy="1803647"/>
+          </a:xfrm>
+        </p:spPr>
+        <p:txBody>
+          <a:bodyPr anchor="ctr">
             <a:normAutofit/>
           </a:bodyPr>
           <a:lstStyle/>
           <a:p>
-            <a:r>
-              <a:rPr lang="zh-TW" altLang="en-US" sz="4000" b="1" dirty="0">
+            <a:pPr algn="ctr">
+              <a:buNone/>
+            </a:pPr>
+            <a:r>
+              <a:rPr lang="zh-TW" altLang="en-US" sz="4800" b="1" dirty="0">
                 <a:solidFill>
                   <a:srgbClr val="000066"/>
                 </a:solidFill>
                 <a:latin typeface="微軟正黑體" pitchFamily="34" charset="-120"/>
                 <a:ea typeface="微軟正黑體" pitchFamily="34" charset="-120"/>
               </a:rPr>
-              <a:t>同來讚美</a:t>
-            </a:r>
-          </a:p>
-        </p:txBody>
-      </p:sp>
-      <p:sp>
-        <p:nvSpPr>
-          <p:cNvPr id="5" name="內容版面配置區 4"/>
-          <p:cNvSpPr>
-            <a:spLocks noGrp="1"/>
-          </p:cNvSpPr>
-          <p:nvPr>
-            <p:ph idx="1"/>
-          </p:nvPr>
-        </p:nvSpPr>
-        <p:spPr/>
-        <p:txBody>
-          <a:bodyPr>
-            <a:noAutofit/>
-          </a:bodyPr>
-          <a:lstStyle/>
-          <a:p>
-            <a:pPr algn="ctr">
-              <a:buNone/>
-            </a:pPr>
-            <a:r>
-              <a:rPr lang="zh-TW" altLang="en-US" sz="4800" b="1" dirty="0">
-                <a:solidFill>
-                  <a:srgbClr val="000066"/>
-                </a:solidFill>
-                <a:latin typeface="微軟正黑體" pitchFamily="34" charset="-120"/>
-                <a:ea typeface="微軟正黑體" pitchFamily="34" charset="-120"/>
-              </a:rPr>
-              <a:t>懷著滿信念</a:t>
-            </a:r>
-            <a:r>
-              <a:rPr lang="en-US" altLang="zh-TW" sz="4800" b="1" dirty="0">
-                <a:solidFill>
-                  <a:srgbClr val="000066"/>
-                </a:solidFill>
-                <a:latin typeface="微軟正黑體" pitchFamily="34" charset="-120"/>
-                <a:ea typeface="微軟正黑體" pitchFamily="34" charset="-120"/>
-              </a:rPr>
-              <a:t>  </a:t>
-            </a:r>
-            <a:r>
-              <a:rPr lang="zh-TW" altLang="en-US" sz="4800" b="1" dirty="0">
-                <a:solidFill>
-                  <a:srgbClr val="000066"/>
-                </a:solidFill>
-                <a:latin typeface="微軟正黑體" pitchFamily="34" charset="-120"/>
-                <a:ea typeface="微軟正黑體" pitchFamily="34" charset="-120"/>
-              </a:rPr>
-              <a:t>一生不改變</a:t>
+              <a:t>前路滿盼望  歡欣將心獻</a:t>
             </a:r>
             <a:endParaRPr lang="en-US" altLang="zh-TW" sz="4800" b="1" dirty="0">
               <a:solidFill>
@@ -3987,7 +3579,157 @@
                 <a:latin typeface="微軟正黑體" pitchFamily="34" charset="-120"/>
                 <a:ea typeface="微軟正黑體" pitchFamily="34" charset="-120"/>
               </a:rPr>
-              <a:t>靠恩主引導每天</a:t>
+              <a:t>願恩主每日記念</a:t>
+            </a:r>
+          </a:p>
+        </p:txBody>
+      </p:sp>
+      <p:sp>
+        <p:nvSpPr>
+          <p:cNvPr id="3" name="TextBox 2"/>
+          <p:cNvSpPr txBox="1"/>
+          <p:nvPr/>
+        </p:nvSpPr>
+        <p:spPr>
+          <a:xfrm>
+            <a:off x="0" y="3867894"/>
+            <a:ext cx="9144000" cy="461665"/>
+          </a:xfrm>
+          <a:prstGeom prst="rect">
+            <a:avLst/>
+          </a:prstGeom>
+          <a:noFill/>
+        </p:spPr>
+        <p:txBody>
+          <a:bodyPr wrap="square" rtlCol="0">
+            <a:spAutoFit/>
+          </a:bodyPr>
+          <a:lstStyle/>
+          <a:p>
+            <a:pPr algn="ctr"/>
+            <a:r>
+              <a:rPr lang="en-US" sz="2400" b="1" dirty="0">
+                <a:solidFill>
+                  <a:srgbClr val="000066"/>
+                </a:solidFill>
+                <a:latin typeface="Microsoft JhengHei" panose="020B0604030504040204" pitchFamily="34" charset="-120"/>
+                <a:ea typeface="Microsoft JhengHei" panose="020B0604030504040204" pitchFamily="34" charset="-120"/>
+              </a:rPr>
+              <a:t>( </a:t>
+            </a:r>
+            <a:r>
+              <a:rPr lang="zh-CN" altLang="en-US" sz="2400" b="1" dirty="0">
+                <a:solidFill>
+                  <a:srgbClr val="000066"/>
+                </a:solidFill>
+                <a:latin typeface="Microsoft JhengHei" panose="020B0604030504040204" pitchFamily="34" charset="-120"/>
+                <a:ea typeface="Microsoft JhengHei" panose="020B0604030504040204" pitchFamily="34" charset="-120"/>
+              </a:rPr>
+              <a:t>副歌</a:t>
+            </a:r>
+            <a:r>
+              <a:rPr lang="en-US" sz="2400" b="1" dirty="0">
+                <a:solidFill>
+                  <a:srgbClr val="000066"/>
+                </a:solidFill>
+                <a:latin typeface="Microsoft JhengHei" panose="020B0604030504040204" pitchFamily="34" charset="-120"/>
+                <a:ea typeface="Microsoft JhengHei" panose="020B0604030504040204" pitchFamily="34" charset="-120"/>
+              </a:rPr>
+              <a:t> )</a:t>
+            </a:r>
+            <a:endParaRPr lang="vi-VN" sz="2400" b="1" dirty="0">
+              <a:solidFill>
+                <a:srgbClr val="000066"/>
+              </a:solidFill>
+              <a:ea typeface="Microsoft JhengHei" panose="020B0604030504040204" pitchFamily="34" charset="-120"/>
+            </a:endParaRPr>
+          </a:p>
+        </p:txBody>
+      </p:sp>
+    </p:spTree>
+    <p:extLst>
+      <p:ext uri="{BB962C8B-B14F-4D97-AF65-F5344CB8AC3E}">
+        <p14:creationId xmlns:p14="http://schemas.microsoft.com/office/powerpoint/2010/main" val="1290273705"/>
+      </p:ext>
+    </p:extLst>
+  </p:cSld>
+  <p:clrMapOvr>
+    <a:masterClrMapping/>
+  </p:clrMapOvr>
+</p:sld>
+</file>
+
+<file path=ppt/slides/slide5.xml><?xml version="1.0" encoding="utf-8"?>
+<p:sld xmlns:a="http://schemas.openxmlformats.org/drawingml/2006/main" xmlns:r="http://schemas.openxmlformats.org/officeDocument/2006/relationships" xmlns:p="http://schemas.openxmlformats.org/presentationml/2006/main">
+  <p:cSld>
+    <p:spTree>
+      <p:nvGrpSpPr>
+        <p:cNvPr id="1" name=""/>
+        <p:cNvGrpSpPr/>
+        <p:nvPr/>
+      </p:nvGrpSpPr>
+      <p:grpSpPr>
+        <a:xfrm>
+          <a:off x="0" y="0"/>
+          <a:ext cx="0" cy="0"/>
+          <a:chOff x="0" y="0"/>
+          <a:chExt cx="0" cy="0"/>
+        </a:xfrm>
+      </p:grpSpPr>
+      <p:sp>
+        <p:nvSpPr>
+          <p:cNvPr id="5" name="內容版面配置區 4"/>
+          <p:cNvSpPr>
+            <a:spLocks noGrp="1"/>
+          </p:cNvSpPr>
+          <p:nvPr>
+            <p:ph idx="1"/>
+          </p:nvPr>
+        </p:nvSpPr>
+        <p:spPr>
+          <a:xfrm>
+            <a:off x="0" y="1563638"/>
+            <a:ext cx="9144000" cy="1803647"/>
+          </a:xfrm>
+        </p:spPr>
+        <p:txBody>
+          <a:bodyPr anchor="ctr">
+            <a:normAutofit/>
+          </a:bodyPr>
+          <a:lstStyle/>
+          <a:p>
+            <a:pPr algn="ctr">
+              <a:buNone/>
+            </a:pPr>
+            <a:r>
+              <a:rPr lang="zh-TW" altLang="en-US" sz="4800" b="1" dirty="0">
+                <a:solidFill>
+                  <a:srgbClr val="000066"/>
+                </a:solidFill>
+                <a:latin typeface="微軟正黑體" pitchFamily="34" charset="-120"/>
+                <a:ea typeface="微軟正黑體" pitchFamily="34" charset="-120"/>
+              </a:rPr>
+              <a:t>同來讚美齊共</a:t>
+            </a:r>
+            <a:r>
+              <a:rPr lang="zh-CN" altLang="en-US" sz="4800" b="1" dirty="0">
+                <a:solidFill>
+                  <a:srgbClr val="000066"/>
+                </a:solidFill>
+                <a:latin typeface="微軟正黑體" pitchFamily="34" charset="-120"/>
+                <a:ea typeface="微軟正黑體" pitchFamily="34" charset="-120"/>
+              </a:rPr>
+              <a:t>跳</a:t>
+            </a:r>
+            <a:r>
+              <a:rPr lang="zh-TW" altLang="en-US" sz="4800" b="1" dirty="0">
+                <a:solidFill>
+                  <a:srgbClr val="000066"/>
+                </a:solidFill>
+                <a:latin typeface="微軟正黑體" pitchFamily="34" charset="-120"/>
+                <a:ea typeface="微軟正黑體" pitchFamily="34" charset="-120"/>
+              </a:rPr>
+              <a:t>  哈利路亞</a:t>
             </a:r>
             <a:endParaRPr lang="en-US" altLang="zh-TW" sz="4800" b="1" dirty="0">
               <a:solidFill>
@@ -4002,14 +3744,34 @@
               <a:buNone/>
             </a:pPr>
             <a:r>
-              <a:rPr lang="zh-TW" altLang="en-US" sz="4800" b="1" dirty="0">
+              <a:rPr lang="zh-CN" altLang="en-US" sz="4800" b="1" dirty="0">
                 <a:solidFill>
                   <a:srgbClr val="000066"/>
                 </a:solidFill>
                 <a:latin typeface="微軟正黑體" pitchFamily="34" charset="-120"/>
                 <a:ea typeface="微軟正黑體" pitchFamily="34" charset="-120"/>
               </a:rPr>
-              <a:t>前路滿盼望  歡欣將心獻</a:t>
+              <a:t>跳</a:t>
+            </a:r>
+            <a:r>
+              <a:rPr lang="zh-TW" altLang="en-US" sz="4800" b="1" dirty="0">
+                <a:solidFill>
+                  <a:srgbClr val="000066"/>
+                </a:solidFill>
+                <a:latin typeface="微軟正黑體" pitchFamily="34" charset="-120"/>
+                <a:ea typeface="微軟正黑體" pitchFamily="34" charset="-120"/>
+              </a:rPr>
+              <a:t>出生命的</a:t>
+            </a:r>
+            <a:r>
+              <a:rPr lang="zh-CN" altLang="en-US" sz="4800" b="1" dirty="0">
+                <a:solidFill>
+                  <a:srgbClr val="000066"/>
+                </a:solidFill>
+                <a:latin typeface="微軟正黑體" pitchFamily="34" charset="-120"/>
+                <a:ea typeface="微軟正黑體" pitchFamily="34" charset="-120"/>
+              </a:rPr>
+              <a:t>舞</a:t>
             </a:r>
             <a:endParaRPr lang="en-US" altLang="zh-TW" sz="4800" b="1" dirty="0">
               <a:solidFill>
@@ -4019,24 +3781,116 @@
               <a:ea typeface="微軟正黑體" pitchFamily="34" charset="-120"/>
             </a:endParaRPr>
           </a:p>
-          <a:p>
-            <a:pPr algn="ctr">
-              <a:buNone/>
-            </a:pPr>
-            <a:r>
-              <a:rPr lang="zh-TW" altLang="en-US" sz="4800" b="1" dirty="0">
+        </p:txBody>
+      </p:sp>
+      <p:sp>
+        <p:nvSpPr>
+          <p:cNvPr id="3" name="TextBox 2"/>
+          <p:cNvSpPr txBox="1"/>
+          <p:nvPr/>
+        </p:nvSpPr>
+        <p:spPr>
+          <a:xfrm>
+            <a:off x="0" y="3867894"/>
+            <a:ext cx="9144000" cy="461665"/>
+          </a:xfrm>
+          <a:prstGeom prst="rect">
+            <a:avLst/>
+          </a:prstGeom>
+          <a:noFill/>
+        </p:spPr>
+        <p:txBody>
+          <a:bodyPr wrap="square" rtlCol="0">
+            <a:spAutoFit/>
+          </a:bodyPr>
+          <a:lstStyle/>
+          <a:p>
+            <a:pPr algn="ctr"/>
+            <a:r>
+              <a:rPr lang="en-US" sz="2400" b="1" dirty="0">
                 <a:solidFill>
                   <a:srgbClr val="000066"/>
                 </a:solidFill>
-                <a:latin typeface="微軟正黑體" pitchFamily="34" charset="-120"/>
-                <a:ea typeface="微軟正黑體" pitchFamily="34" charset="-120"/>
+                <a:latin typeface="Microsoft JhengHei" panose="020B0604030504040204" pitchFamily="34" charset="-120"/>
+                <a:ea typeface="Microsoft JhengHei" panose="020B0604030504040204" pitchFamily="34" charset="-120"/>
               </a:rPr>
-              <a:t>願恩主每日記念</a:t>
-            </a:r>
+              <a:t>( </a:t>
+            </a:r>
+            <a:r>
+              <a:rPr lang="zh-CN" altLang="en-US" sz="2400" b="1" dirty="0">
+                <a:solidFill>
+                  <a:srgbClr val="000066"/>
+                </a:solidFill>
+                <a:latin typeface="Microsoft JhengHei" panose="020B0604030504040204" pitchFamily="34" charset="-120"/>
+                <a:ea typeface="Microsoft JhengHei" panose="020B0604030504040204" pitchFamily="34" charset="-120"/>
+              </a:rPr>
+              <a:t>正歌 </a:t>
+            </a:r>
+            <a:r>
+              <a:rPr lang="en-US" altLang="zh-CN" sz="2400" b="1" dirty="0">
+                <a:solidFill>
+                  <a:srgbClr val="000066"/>
+                </a:solidFill>
+                <a:latin typeface="Microsoft JhengHei" panose="020B0604030504040204" pitchFamily="34" charset="-120"/>
+                <a:ea typeface="Microsoft JhengHei" panose="020B0604030504040204" pitchFamily="34" charset="-120"/>
+              </a:rPr>
+              <a:t>2</a:t>
+            </a:r>
+            <a:r>
+              <a:rPr lang="en-US" sz="2400" b="1" dirty="0">
+                <a:solidFill>
+                  <a:srgbClr val="000066"/>
+                </a:solidFill>
+                <a:latin typeface="Microsoft JhengHei" panose="020B0604030504040204" pitchFamily="34" charset="-120"/>
+                <a:ea typeface="Microsoft JhengHei" panose="020B0604030504040204" pitchFamily="34" charset="-120"/>
+              </a:rPr>
+              <a:t> )</a:t>
+            </a:r>
+            <a:r>
+              <a:rPr lang="zh-CN" altLang="en-US" sz="2400" b="1" dirty="0">
+                <a:solidFill>
+                  <a:srgbClr val="000066"/>
+                </a:solidFill>
+                <a:latin typeface="Microsoft JhengHei" panose="020B0604030504040204" pitchFamily="34" charset="-120"/>
+                <a:ea typeface="Microsoft JhengHei" panose="020B0604030504040204" pitchFamily="34" charset="-120"/>
+              </a:rPr>
+              <a:t>（</a:t>
+            </a:r>
+            <a:r>
+              <a:rPr lang="en-US" altLang="zh-CN" sz="2400" b="1" dirty="0">
+                <a:solidFill>
+                  <a:srgbClr val="000066"/>
+                </a:solidFill>
+                <a:latin typeface="Microsoft JhengHei" panose="020B0604030504040204" pitchFamily="34" charset="-120"/>
+                <a:ea typeface="Microsoft JhengHei" panose="020B0604030504040204" pitchFamily="34" charset="-120"/>
+              </a:rPr>
+              <a:t>2</a:t>
+            </a:r>
+            <a:r>
+              <a:rPr lang="zh-CN" altLang="en-US" sz="2400" b="1" dirty="0">
+                <a:solidFill>
+                  <a:srgbClr val="000066"/>
+                </a:solidFill>
+                <a:latin typeface="Microsoft JhengHei" panose="020B0604030504040204" pitchFamily="34" charset="-120"/>
+                <a:ea typeface="Microsoft JhengHei" panose="020B0604030504040204" pitchFamily="34" charset="-120"/>
+              </a:rPr>
+              <a:t>次）</a:t>
+            </a:r>
+            <a:endParaRPr lang="vi-VN" sz="2400" b="1" dirty="0">
+              <a:solidFill>
+                <a:srgbClr val="000066"/>
+              </a:solidFill>
+              <a:ea typeface="Microsoft JhengHei" panose="020B0604030504040204" pitchFamily="34" charset="-120"/>
+            </a:endParaRPr>
           </a:p>
         </p:txBody>
       </p:sp>
     </p:spTree>
+    <p:extLst>
+      <p:ext uri="{BB962C8B-B14F-4D97-AF65-F5344CB8AC3E}">
+        <p14:creationId xmlns:p14="http://schemas.microsoft.com/office/powerpoint/2010/main" val="1528335465"/>
+      </p:ext>
+    </p:extLst>
   </p:cSld>
   <p:clrMapOvr>
     <a:masterClrMapping/>
